--- a/python_course/chapter_07_functions/presentation.pptx
+++ b/python_course/chapter_07_functions/presentation.pptx
@@ -19,7 +19,7 @@
     <p:sldId id="267" r:id="rId18"/>
     <p:sldId id="268" r:id="rId19"/>
   </p:sldIdLst>
-  <p:sldSz cx="9144000" cy="6858000" type="screen4x3"/>
+  <p:sldSz cx="12191695" cy="6858000" type="screen4x3"/>
   <p:notesSz cx="6858000" cy="9144000"/>
   <p:defaultTextStyle>
     <a:defPPr>
@@ -3109,7 +3109,7 @@
         <p:spPr>
           <a:xfrm>
             <a:off x="0" y="0"/>
-            <a:ext cx="9144000" cy="6858000"/>
+            <a:ext cx="12191695" cy="6858000"/>
           </a:xfrm>
           <a:prstGeom prst="rect">
             <a:avLst/>
@@ -3151,8 +3151,8 @@
         </p:nvSpPr>
         <p:spPr>
           <a:xfrm>
-            <a:off x="914400" y="2286000"/>
-            <a:ext cx="7315200" cy="914400"/>
+            <a:off x="914400" y="1828800"/>
+            <a:ext cx="10360152" cy="1371600"/>
           </a:xfrm>
           <a:prstGeom prst="rect">
             <a:avLst/>
@@ -3186,8 +3186,8 @@
         </p:nvSpPr>
         <p:spPr>
           <a:xfrm>
-            <a:off x="914400" y="3474720"/>
-            <a:ext cx="7315200" cy="548640"/>
+            <a:off x="914400" y="3657600"/>
+            <a:ext cx="10360152" cy="548640"/>
           </a:xfrm>
           <a:prstGeom prst="rect">
             <a:avLst/>
@@ -3221,8 +3221,8 @@
         </p:nvSpPr>
         <p:spPr>
           <a:xfrm>
-            <a:off x="914400" y="4114800"/>
-            <a:ext cx="7315200" cy="548640"/>
+            <a:off x="914400" y="4297680"/>
+            <a:ext cx="10360152" cy="548640"/>
           </a:xfrm>
           <a:prstGeom prst="rect">
             <a:avLst/>
@@ -3275,7 +3275,7 @@
         <p:spPr>
           <a:xfrm>
             <a:off x="0" y="0"/>
-            <a:ext cx="9144000" cy="6858000"/>
+            <a:ext cx="12191695" cy="6858000"/>
           </a:xfrm>
           <a:prstGeom prst="rect">
             <a:avLst/>
@@ -3318,7 +3318,7 @@
         <p:spPr>
           <a:xfrm>
             <a:off x="0" y="0"/>
-            <a:ext cx="9144000" cy="137160"/>
+            <a:ext cx="12191695" cy="137160"/>
           </a:xfrm>
           <a:prstGeom prst="rect">
             <a:avLst/>
@@ -3361,7 +3361,7 @@
         <p:spPr>
           <a:xfrm>
             <a:off x="457200" y="365760"/>
-            <a:ext cx="8229600" cy="731520"/>
+            <a:ext cx="10972800" cy="731520"/>
           </a:xfrm>
           <a:prstGeom prst="rect">
             <a:avLst/>
@@ -3439,7 +3439,7 @@
         <p:spPr>
           <a:xfrm>
             <a:off x="640080" y="1371600"/>
-            <a:ext cx="7863840" cy="3657600"/>
+            <a:ext cx="10789920" cy="4572000"/>
           </a:xfrm>
           <a:prstGeom prst="rect">
             <a:avLst/>
@@ -3540,7 +3540,7 @@
         <p:spPr>
           <a:xfrm>
             <a:off x="0" y="0"/>
-            <a:ext cx="9144000" cy="6858000"/>
+            <a:ext cx="12191695" cy="6858000"/>
           </a:xfrm>
           <a:prstGeom prst="rect">
             <a:avLst/>
@@ -3583,7 +3583,7 @@
         <p:spPr>
           <a:xfrm>
             <a:off x="0" y="0"/>
-            <a:ext cx="9144000" cy="137160"/>
+            <a:ext cx="12191695" cy="137160"/>
           </a:xfrm>
           <a:prstGeom prst="rect">
             <a:avLst/>
@@ -3626,7 +3626,7 @@
         <p:spPr>
           <a:xfrm>
             <a:off x="457200" y="365760"/>
-            <a:ext cx="8229600" cy="731520"/>
+            <a:ext cx="10972800" cy="731520"/>
           </a:xfrm>
           <a:prstGeom prst="rect">
             <a:avLst/>
@@ -3704,7 +3704,7 @@
         <p:spPr>
           <a:xfrm>
             <a:off x="640080" y="1371600"/>
-            <a:ext cx="7863840" cy="3657600"/>
+            <a:ext cx="10789920" cy="4572000"/>
           </a:xfrm>
           <a:prstGeom prst="rect">
             <a:avLst/>
@@ -3760,7 +3760,7 @@
         <p:spPr>
           <a:xfrm>
             <a:off x="0" y="0"/>
-            <a:ext cx="9144000" cy="6858000"/>
+            <a:ext cx="12191695" cy="6858000"/>
           </a:xfrm>
           <a:prstGeom prst="rect">
             <a:avLst/>
@@ -3803,7 +3803,7 @@
         <p:spPr>
           <a:xfrm>
             <a:off x="0" y="0"/>
-            <a:ext cx="9144000" cy="137160"/>
+            <a:ext cx="12191695" cy="137160"/>
           </a:xfrm>
           <a:prstGeom prst="rect">
             <a:avLst/>
@@ -3846,7 +3846,7 @@
         <p:spPr>
           <a:xfrm>
             <a:off x="457200" y="365760"/>
-            <a:ext cx="8229600" cy="731520"/>
+            <a:ext cx="10972800" cy="731520"/>
           </a:xfrm>
           <a:prstGeom prst="rect">
             <a:avLst/>
@@ -3924,7 +3924,7 @@
         <p:spPr>
           <a:xfrm>
             <a:off x="640080" y="1371600"/>
-            <a:ext cx="7863840" cy="3657600"/>
+            <a:ext cx="10789920" cy="4572000"/>
           </a:xfrm>
           <a:prstGeom prst="rect">
             <a:avLst/>
@@ -4115,7 +4115,7 @@
         <p:spPr>
           <a:xfrm>
             <a:off x="0" y="0"/>
-            <a:ext cx="9144000" cy="6858000"/>
+            <a:ext cx="12191695" cy="6858000"/>
           </a:xfrm>
           <a:prstGeom prst="rect">
             <a:avLst/>
@@ -4157,8 +4157,8 @@
         </p:nvSpPr>
         <p:spPr>
           <a:xfrm>
-            <a:off x="914400" y="2286000"/>
-            <a:ext cx="7315200" cy="914400"/>
+            <a:off x="914400" y="1828800"/>
+            <a:ext cx="10360152" cy="1371600"/>
           </a:xfrm>
           <a:prstGeom prst="rect">
             <a:avLst/>
@@ -4192,8 +4192,8 @@
         </p:nvSpPr>
         <p:spPr>
           <a:xfrm>
-            <a:off x="914400" y="3474720"/>
-            <a:ext cx="7315200" cy="548640"/>
+            <a:off x="914400" y="3657600"/>
+            <a:ext cx="10360152" cy="548640"/>
           </a:xfrm>
           <a:prstGeom prst="rect">
             <a:avLst/>
@@ -4227,8 +4227,8 @@
         </p:nvSpPr>
         <p:spPr>
           <a:xfrm>
-            <a:off x="914400" y="4114800"/>
-            <a:ext cx="7315200" cy="548640"/>
+            <a:off x="914400" y="4297680"/>
+            <a:ext cx="10360152" cy="548640"/>
           </a:xfrm>
           <a:prstGeom prst="rect">
             <a:avLst/>
@@ -4281,7 +4281,7 @@
         <p:spPr>
           <a:xfrm>
             <a:off x="0" y="0"/>
-            <a:ext cx="9144000" cy="6858000"/>
+            <a:ext cx="12191695" cy="6858000"/>
           </a:xfrm>
           <a:prstGeom prst="rect">
             <a:avLst/>
@@ -4324,7 +4324,7 @@
         <p:spPr>
           <a:xfrm>
             <a:off x="0" y="0"/>
-            <a:ext cx="9144000" cy="137160"/>
+            <a:ext cx="12191695" cy="137160"/>
           </a:xfrm>
           <a:prstGeom prst="rect">
             <a:avLst/>
@@ -4367,7 +4367,7 @@
         <p:spPr>
           <a:xfrm>
             <a:off x="457200" y="365760"/>
-            <a:ext cx="8229600" cy="731520"/>
+            <a:ext cx="10972800" cy="731520"/>
           </a:xfrm>
           <a:prstGeom prst="rect">
             <a:avLst/>
@@ -4445,7 +4445,7 @@
         <p:spPr>
           <a:xfrm>
             <a:off x="640080" y="1371600"/>
-            <a:ext cx="7863840" cy="3657600"/>
+            <a:ext cx="10789920" cy="4572000"/>
           </a:xfrm>
           <a:prstGeom prst="rect">
             <a:avLst/>
@@ -4621,7 +4621,7 @@
         <p:spPr>
           <a:xfrm>
             <a:off x="0" y="0"/>
-            <a:ext cx="9144000" cy="6858000"/>
+            <a:ext cx="12191695" cy="6858000"/>
           </a:xfrm>
           <a:prstGeom prst="rect">
             <a:avLst/>
@@ -4664,7 +4664,7 @@
         <p:spPr>
           <a:xfrm>
             <a:off x="0" y="0"/>
-            <a:ext cx="9144000" cy="137160"/>
+            <a:ext cx="12191695" cy="137160"/>
           </a:xfrm>
           <a:prstGeom prst="rect">
             <a:avLst/>
@@ -4707,7 +4707,7 @@
         <p:spPr>
           <a:xfrm>
             <a:off x="457200" y="365760"/>
-            <a:ext cx="8229600" cy="731520"/>
+            <a:ext cx="10972800" cy="731520"/>
           </a:xfrm>
           <a:prstGeom prst="rect">
             <a:avLst/>
@@ -4785,7 +4785,7 @@
         <p:spPr>
           <a:xfrm>
             <a:off x="640080" y="1371600"/>
-            <a:ext cx="7863840" cy="3657600"/>
+            <a:ext cx="10789920" cy="4572000"/>
           </a:xfrm>
           <a:prstGeom prst="rect">
             <a:avLst/>
@@ -4871,7 +4871,7 @@
         <p:spPr>
           <a:xfrm>
             <a:off x="0" y="0"/>
-            <a:ext cx="9144000" cy="6858000"/>
+            <a:ext cx="12191695" cy="6858000"/>
           </a:xfrm>
           <a:prstGeom prst="rect">
             <a:avLst/>
@@ -4914,7 +4914,7 @@
         <p:spPr>
           <a:xfrm>
             <a:off x="0" y="0"/>
-            <a:ext cx="9144000" cy="137160"/>
+            <a:ext cx="12191695" cy="137160"/>
           </a:xfrm>
           <a:prstGeom prst="rect">
             <a:avLst/>
@@ -4957,7 +4957,7 @@
         <p:spPr>
           <a:xfrm>
             <a:off x="457200" y="365760"/>
-            <a:ext cx="8229600" cy="731520"/>
+            <a:ext cx="10972800" cy="731520"/>
           </a:xfrm>
           <a:prstGeom prst="rect">
             <a:avLst/>
@@ -5035,7 +5035,7 @@
         <p:spPr>
           <a:xfrm>
             <a:off x="640080" y="1371600"/>
-            <a:ext cx="7863840" cy="3657600"/>
+            <a:ext cx="10789920" cy="4572000"/>
           </a:xfrm>
           <a:prstGeom prst="rect">
             <a:avLst/>
@@ -5166,7 +5166,7 @@
         <p:spPr>
           <a:xfrm>
             <a:off x="0" y="0"/>
-            <a:ext cx="9144000" cy="6858000"/>
+            <a:ext cx="12191695" cy="6858000"/>
           </a:xfrm>
           <a:prstGeom prst="rect">
             <a:avLst/>
@@ -5209,7 +5209,7 @@
         <p:spPr>
           <a:xfrm>
             <a:off x="0" y="0"/>
-            <a:ext cx="9144000" cy="137160"/>
+            <a:ext cx="12191695" cy="137160"/>
           </a:xfrm>
           <a:prstGeom prst="rect">
             <a:avLst/>
@@ -5252,7 +5252,7 @@
         <p:spPr>
           <a:xfrm>
             <a:off x="457200" y="365760"/>
-            <a:ext cx="8229600" cy="731520"/>
+            <a:ext cx="10972800" cy="731520"/>
           </a:xfrm>
           <a:prstGeom prst="rect">
             <a:avLst/>
@@ -5330,7 +5330,7 @@
         <p:spPr>
           <a:xfrm>
             <a:off x="640080" y="1371600"/>
-            <a:ext cx="7863840" cy="3657600"/>
+            <a:ext cx="10789920" cy="4572000"/>
           </a:xfrm>
           <a:prstGeom prst="rect">
             <a:avLst/>
@@ -5416,7 +5416,7 @@
         <p:spPr>
           <a:xfrm>
             <a:off x="0" y="0"/>
-            <a:ext cx="9144000" cy="6858000"/>
+            <a:ext cx="12191695" cy="6858000"/>
           </a:xfrm>
           <a:prstGeom prst="rect">
             <a:avLst/>
@@ -5459,7 +5459,7 @@
         <p:spPr>
           <a:xfrm>
             <a:off x="0" y="0"/>
-            <a:ext cx="9144000" cy="137160"/>
+            <a:ext cx="12191695" cy="137160"/>
           </a:xfrm>
           <a:prstGeom prst="rect">
             <a:avLst/>
@@ -5502,7 +5502,7 @@
         <p:spPr>
           <a:xfrm>
             <a:off x="457200" y="365760"/>
-            <a:ext cx="8229600" cy="731520"/>
+            <a:ext cx="10972800" cy="731520"/>
           </a:xfrm>
           <a:prstGeom prst="rect">
             <a:avLst/>
@@ -5580,7 +5580,7 @@
         <p:spPr>
           <a:xfrm>
             <a:off x="640080" y="1371600"/>
-            <a:ext cx="7863840" cy="3657600"/>
+            <a:ext cx="10789920" cy="4572000"/>
           </a:xfrm>
           <a:prstGeom prst="rect">
             <a:avLst/>
@@ -5666,7 +5666,7 @@
         <p:spPr>
           <a:xfrm>
             <a:off x="0" y="0"/>
-            <a:ext cx="9144000" cy="6858000"/>
+            <a:ext cx="12191695" cy="6858000"/>
           </a:xfrm>
           <a:prstGeom prst="rect">
             <a:avLst/>
@@ -5709,7 +5709,7 @@
         <p:spPr>
           <a:xfrm>
             <a:off x="0" y="0"/>
-            <a:ext cx="9144000" cy="137160"/>
+            <a:ext cx="12191695" cy="137160"/>
           </a:xfrm>
           <a:prstGeom prst="rect">
             <a:avLst/>
@@ -5752,7 +5752,7 @@
         <p:spPr>
           <a:xfrm>
             <a:off x="457200" y="365760"/>
-            <a:ext cx="8229600" cy="731520"/>
+            <a:ext cx="10972800" cy="731520"/>
           </a:xfrm>
           <a:prstGeom prst="rect">
             <a:avLst/>
@@ -5830,7 +5830,7 @@
         <p:spPr>
           <a:xfrm>
             <a:off x="640080" y="1371600"/>
-            <a:ext cx="7863840" cy="3657600"/>
+            <a:ext cx="10789920" cy="4572000"/>
           </a:xfrm>
           <a:prstGeom prst="rect">
             <a:avLst/>
@@ -5916,7 +5916,7 @@
         <p:spPr>
           <a:xfrm>
             <a:off x="0" y="0"/>
-            <a:ext cx="9144000" cy="6858000"/>
+            <a:ext cx="12191695" cy="6858000"/>
           </a:xfrm>
           <a:prstGeom prst="rect">
             <a:avLst/>
@@ -5959,7 +5959,7 @@
         <p:spPr>
           <a:xfrm>
             <a:off x="0" y="0"/>
-            <a:ext cx="9144000" cy="137160"/>
+            <a:ext cx="12191695" cy="137160"/>
           </a:xfrm>
           <a:prstGeom prst="rect">
             <a:avLst/>
@@ -6002,7 +6002,7 @@
         <p:spPr>
           <a:xfrm>
             <a:off x="457200" y="365760"/>
-            <a:ext cx="8229600" cy="731520"/>
+            <a:ext cx="10972800" cy="731520"/>
           </a:xfrm>
           <a:prstGeom prst="rect">
             <a:avLst/>
@@ -6080,7 +6080,7 @@
         <p:spPr>
           <a:xfrm>
             <a:off x="640080" y="1371600"/>
-            <a:ext cx="7863840" cy="3657600"/>
+            <a:ext cx="10789920" cy="4572000"/>
           </a:xfrm>
           <a:prstGeom prst="rect">
             <a:avLst/>
@@ -6196,7 +6196,7 @@
         <p:spPr>
           <a:xfrm>
             <a:off x="0" y="0"/>
-            <a:ext cx="9144000" cy="6858000"/>
+            <a:ext cx="12191695" cy="6858000"/>
           </a:xfrm>
           <a:prstGeom prst="rect">
             <a:avLst/>
@@ -6239,7 +6239,7 @@
         <p:spPr>
           <a:xfrm>
             <a:off x="0" y="0"/>
-            <a:ext cx="9144000" cy="137160"/>
+            <a:ext cx="12191695" cy="137160"/>
           </a:xfrm>
           <a:prstGeom prst="rect">
             <a:avLst/>
@@ -6282,7 +6282,7 @@
         <p:spPr>
           <a:xfrm>
             <a:off x="457200" y="365760"/>
-            <a:ext cx="8229600" cy="731520"/>
+            <a:ext cx="10972800" cy="731520"/>
           </a:xfrm>
           <a:prstGeom prst="rect">
             <a:avLst/>
@@ -6360,7 +6360,7 @@
         <p:spPr>
           <a:xfrm>
             <a:off x="640080" y="1371600"/>
-            <a:ext cx="7863840" cy="3657600"/>
+            <a:ext cx="10789920" cy="4572000"/>
           </a:xfrm>
           <a:prstGeom prst="rect">
             <a:avLst/>
